--- a/0F. SmallNetworksSTM-WTA.pptx
+++ b/0F. SmallNetworksSTM-WTA.pptx
@@ -124,7 +124,7 @@
 <p1510:revInfo xmlns:a="http://schemas.openxmlformats.org/drawingml/2006/main" xmlns:r="http://schemas.openxmlformats.org/officeDocument/2006/relationships" xmlns:p1510="http://schemas.microsoft.com/office/powerpoint/2015/10/main">
   <p1510:revLst>
     <p1510:client id="{3CF760C2-3403-4A39-888D-D121F39DCDF2}" v="15" dt="2026-03-23T00:35:18.500"/>
-    <p1510:client id="{E51B09C9-F37E-471A-90F7-7B011EFD101D}" v="3" dt="2026-03-23T06:03:48.531"/>
+    <p1510:client id="{E51B09C9-F37E-471A-90F7-7B011EFD101D}" v="6" dt="2026-03-23T18:16:59.502"/>
   </p1510:revLst>
 </p1510:revInfo>
 </file>
@@ -134,7 +134,7 @@
   <pc:docChgLst>
     <pc:chgData name="Nair, Satish" userId="af50c098-07d3-4545-ad93-15c24b849386" providerId="ADAL" clId="{B575728E-D61F-49E0-BC8E-8DC5242C7AE2}"/>
     <pc:docChg chg="undo redo custSel addSld delSld modSld sldOrd">
-      <pc:chgData name="Nair, Satish" userId="af50c098-07d3-4545-ad93-15c24b849386" providerId="ADAL" clId="{B575728E-D61F-49E0-BC8E-8DC5242C7AE2}" dt="2026-03-23T06:04:01.566" v="1237" actId="2711"/>
+      <pc:chgData name="Nair, Satish" userId="af50c098-07d3-4545-ad93-15c24b849386" providerId="ADAL" clId="{B575728E-D61F-49E0-BC8E-8DC5242C7AE2}" dt="2026-03-23T18:16:59.502" v="1242"/>
       <pc:docMkLst>
         <pc:docMk/>
       </pc:docMkLst>
@@ -262,13 +262,13 @@
         </pc:picChg>
       </pc:sldChg>
       <pc:sldChg chg="modSp add mod ord">
-        <pc:chgData name="Nair, Satish" userId="af50c098-07d3-4545-ad93-15c24b849386" providerId="ADAL" clId="{B575728E-D61F-49E0-BC8E-8DC5242C7AE2}" dt="2026-03-23T06:04:01.566" v="1237" actId="2711"/>
+        <pc:chgData name="Nair, Satish" userId="af50c098-07d3-4545-ad93-15c24b849386" providerId="ADAL" clId="{B575728E-D61F-49E0-BC8E-8DC5242C7AE2}" dt="2026-03-23T18:16:59.502" v="1242"/>
         <pc:sldMkLst>
           <pc:docMk/>
           <pc:sldMk cId="2936881161" sldId="264"/>
         </pc:sldMkLst>
         <pc:spChg chg="mod">
-          <ac:chgData name="Nair, Satish" userId="af50c098-07d3-4545-ad93-15c24b849386" providerId="ADAL" clId="{B575728E-D61F-49E0-BC8E-8DC5242C7AE2}" dt="2026-03-23T06:04:01.566" v="1237" actId="2711"/>
+          <ac:chgData name="Nair, Satish" userId="af50c098-07d3-4545-ad93-15c24b849386" providerId="ADAL" clId="{B575728E-D61F-49E0-BC8E-8DC5242C7AE2}" dt="2026-03-23T18:16:59.502" v="1242"/>
           <ac:spMkLst>
             <pc:docMk/>
             <pc:sldMk cId="2936881161" sldId="264"/>
@@ -4213,15 +4213,21 @@
                 <a:ea typeface="Times New Roman" panose="02020603050405020304" pitchFamily="18" charset="0"/>
                 <a:cs typeface="Times New Roman" panose="02020603050405020304" pitchFamily="18" charset="0"/>
               </a:rPr>
-              <a:t>: Click on the following link - </a:t>
-            </a:r>
-            <a:r>
-              <a:rPr lang="en-US" altLang="en-US" sz="1700" dirty="0" err="1">
+              <a:t>: Click on the following link -  </a:t>
+            </a:r>
+            <a:r>
+              <a:rPr lang="en-US" u="sng">
+                <a:hlinkClick r:id="rId2"/>
+              </a:rPr>
+              <a:t>Colab_F</a:t>
+            </a:r>
+            <a:r>
+              <a:rPr lang="en-US" altLang="en-US" sz="1700">
                 <a:latin typeface="+mn-lt"/>
                 <a:ea typeface="Times New Roman" panose="02020603050405020304" pitchFamily="18" charset="0"/>
                 <a:cs typeface="Times New Roman" panose="02020603050405020304" pitchFamily="18" charset="0"/>
               </a:rPr>
-              <a:t>Colab_A</a:t>
+              <a:t> </a:t>
             </a:r>
             <a:r>
               <a:rPr lang="en-US" altLang="en-US" sz="1700" dirty="0">
@@ -4229,7 +4235,7 @@
                 <a:ea typeface="Times New Roman" panose="02020603050405020304" pitchFamily="18" charset="0"/>
                 <a:cs typeface="Times New Roman" panose="02020603050405020304" pitchFamily="18" charset="0"/>
               </a:rPr>
-              <a:t> and complete the sequentially arranged hand-on learning - generating AI prompts for explanations and complete the exercises at the end.</a:t>
+              <a:t>and complete the sequentially arranged hand-on learning - generating AI prompts for explanations and complete the exercises at the end.</a:t>
             </a:r>
           </a:p>
           <a:p>
